--- a/powerpoints/Seance_04_Scene2_The_room.pptx
+++ b/powerpoints/Seance_04_Scene2_The_room.pptx
@@ -142,18 +142,18 @@
   <p:extLst>
     <p:ext uri="{521415D9-36F7-43E2-AB2F-B90AF26B5E84}">
       <p14:sectionLst xmlns:p14="http://schemas.microsoft.com/office/powerpoint/2010/main">
-        <p14:section name="Ouverture" id="{53c0ea18-590c-96b5-1858-2aee5326ac9e}">
+        <p14:section name="Ouverture" id="{814c6e3e-17c5-4fc6-97ed-c9901d373b06}">
           <p14:sldIdLst>
             <p14:sldId id="256"/>
           </p14:sldIdLst>
         </p14:section>
-        <p14:section name="Warm-up" id="{d22dfa88-cae1-43b2-caaa-a0d3518fdfac}">
+        <p14:section name="Warm-up" id="{3d623aa8-3c46-055b-8b9a-20bf9a6a278e}">
           <p14:sldIdLst>
             <p14:sldId id="257"/>
             <p14:sldId id="258"/>
           </p14:sldIdLst>
         </p14:section>
-        <p14:section name="The room" id="{3457ee9d-74b5-3f72-b263-a06fbd6263cf}">
+        <p14:section name="The room" id="{9c5e8d4c-6660-845f-2089-ed067bbb29df}">
           <p14:sldIdLst>
             <p14:sldId id="259"/>
             <p14:sldId id="260"/>
@@ -164,7 +164,7 @@
             <p14:sldId id="265"/>
           </p14:sldIdLst>
         </p14:section>
-        <p14:section name="Listen, then read" id="{692da8d7-7a29-2edc-8cda-9d1af5f2a76f}">
+        <p14:section name="Listen, then read" id="{4d6df30b-d633-efef-e097-68f4fe3a985b}">
           <p14:sldIdLst>
             <p14:sldId id="266"/>
             <p14:sldId id="267"/>
@@ -173,7 +173,7 @@
             <p14:sldId id="270"/>
           </p14:sldIdLst>
         </p14:section>
-        <p14:section name="Read for facts" id="{e258ee16-9f68-5e4b-b382-48af95d09eb0}">
+        <p14:section name="Read for facts" id="{762534d8-1365-7078-1425-033677aa7fb3}">
           <p14:sldIdLst>
             <p14:sldId id="271"/>
             <p14:sldId id="272"/>
@@ -184,7 +184,7 @@
             <p14:sldId id="277"/>
           </p14:sldIdLst>
         </p14:section>
-        <p14:section name="Grammar: the past continuous" id="{8cdc5f03-477a-6772-3167-dfe360b87b52}">
+        <p14:section name="Grammar: the past continuous" id="{3c3042fc-44c5-03c5-12fb-85a4351c164c}">
           <p14:sldIdLst>
             <p14:sldId id="278"/>
             <p14:sldId id="279"/>
@@ -195,13 +195,13 @@
             <p14:sldId id="284"/>
           </p14:sldIdLst>
         </p14:section>
-        <p14:section name="Listening: the cleaner" id="{fd3c5eca-8761-1b5b-3daa-4d25849e6f08}">
+        <p14:section name="Listening: the cleaner" id="{d0637a4c-6968-5198-8ba8-c3c1cc7c3876}">
           <p14:sldIdLst>
             <p14:sldId id="285"/>
             <p14:sldId id="286"/>
           </p14:sldIdLst>
         </p14:section>
-        <p14:section name="Words and speaking" id="{d81d0592-71db-7960-b560-f94034fe4a7e}">
+        <p14:section name="Words and speaking" id="{20a41d68-d754-f6aa-6552-c1745f6642b4}">
           <p14:sldIdLst>
             <p14:sldId id="287"/>
             <p14:sldId id="288"/>
@@ -209,7 +209,7 @@
             <p14:sldId id="290"/>
           </p14:sldIdLst>
         </p14:section>
-        <p14:section name="Clôture" id="{1b178b4d-207c-38a9-7bb9-cea6d0973136}">
+        <p14:section name="Clôture" id="{112006c6-1581-8146-6a7a-1b5ffa1ab06d}">
           <p14:sldIdLst>
             <p14:sldId id="291"/>
           </p14:sldIdLst>
@@ -21900,8 +21900,8 @@
         </p:nvSpPr>
         <p:spPr>
           <a:xfrm>
-            <a:off x="749808" y="1965960"/>
-            <a:ext cx="2219706" cy="292608"/>
+            <a:off x="749808" y="1929384"/>
+            <a:ext cx="2219706" cy="274320"/>
           </a:xfrm>
           <a:prstGeom prst="rect">
             <a:avLst/>
@@ -21936,8 +21936,8 @@
         </p:nvSpPr>
         <p:spPr>
           <a:xfrm>
-            <a:off x="749808" y="2286000"/>
-            <a:ext cx="2219706" cy="603504"/>
+            <a:off x="749808" y="2221992"/>
+            <a:ext cx="2219706" cy="512064"/>
           </a:xfrm>
           <a:prstGeom prst="rect">
             <a:avLst/>
@@ -21953,7 +21953,7 @@
               <a:buNone/>
             </a:pPr>
             <a:r>
-              <a:rPr lang="en-US" sz="2600" b="1" dirty="0">
+              <a:rPr lang="en-US" sz="2300" b="1" dirty="0">
                 <a:solidFill>
                   <a:schemeClr val="accent2"/>
                 </a:solidFill>
@@ -21964,7 +21964,7 @@
               <a:t>was</a:t>
             </a:r>
             <a:r>
-              <a:rPr lang="en-US" sz="2600" b="1" dirty="0">
+              <a:rPr lang="en-US" sz="2300" b="1" dirty="0">
                 <a:solidFill>
                   <a:schemeClr val="tx2"/>
                 </a:solidFill>
@@ -21974,7 +21974,7 @@
               </a:rPr>
               <a:t> + -ing</a:t>
             </a:r>
-            <a:endParaRPr lang="en-US" sz="2600" dirty="0"/>
+            <a:endParaRPr lang="en-US" sz="2300" dirty="0"/>
           </a:p>
         </p:txBody>
       </p:sp>
@@ -21986,8 +21986,8 @@
         </p:nvSpPr>
         <p:spPr>
           <a:xfrm>
-            <a:off x="749808" y="2898648"/>
-            <a:ext cx="2219706" cy="347472"/>
+            <a:off x="749808" y="2752344"/>
+            <a:ext cx="2219706" cy="310896"/>
           </a:xfrm>
           <a:prstGeom prst="rect">
             <a:avLst/>
@@ -22030,7 +22030,7 @@
         </p:nvSpPr>
         <p:spPr>
           <a:xfrm>
-            <a:off x="749808" y="3300984"/>
+            <a:off x="749808" y="3118104"/>
             <a:ext cx="2219706" cy="0"/>
           </a:xfrm>
           <a:prstGeom prst="line">
@@ -22053,8 +22053,8 @@
         </p:nvSpPr>
         <p:spPr>
           <a:xfrm>
-            <a:off x="749808" y="3410712"/>
-            <a:ext cx="2219706" cy="1831848"/>
+            <a:off x="749808" y="3209544"/>
+            <a:ext cx="2219706" cy="2005584"/>
           </a:xfrm>
           <a:prstGeom prst="rect">
             <a:avLst/>
@@ -22151,8 +22151,8 @@
         </p:nvSpPr>
         <p:spPr>
           <a:xfrm>
-            <a:off x="3573018" y="1965960"/>
-            <a:ext cx="2219706" cy="292608"/>
+            <a:off x="3573018" y="1929384"/>
+            <a:ext cx="2219706" cy="274320"/>
           </a:xfrm>
           <a:prstGeom prst="rect">
             <a:avLst/>
@@ -22187,8 +22187,8 @@
         </p:nvSpPr>
         <p:spPr>
           <a:xfrm>
-            <a:off x="3573018" y="2286000"/>
-            <a:ext cx="2219706" cy="603504"/>
+            <a:off x="3573018" y="2221992"/>
+            <a:ext cx="2219706" cy="512064"/>
           </a:xfrm>
           <a:prstGeom prst="rect">
             <a:avLst/>
@@ -22204,7 +22204,7 @@
               <a:buNone/>
             </a:pPr>
             <a:r>
-              <a:rPr lang="en-US" sz="2600" b="1" dirty="0">
+              <a:rPr lang="en-US" sz="2300" b="1" dirty="0">
                 <a:solidFill>
                   <a:schemeClr val="accent2"/>
                 </a:solidFill>
@@ -22215,7 +22215,7 @@
               <a:t>wasn’t</a:t>
             </a:r>
             <a:r>
-              <a:rPr lang="en-US" sz="2600" b="1" dirty="0">
+              <a:rPr lang="en-US" sz="2300" b="1" dirty="0">
                 <a:solidFill>
                   <a:schemeClr val="tx2"/>
                 </a:solidFill>
@@ -22225,7 +22225,7 @@
               </a:rPr>
               <a:t> + -ing</a:t>
             </a:r>
-            <a:endParaRPr lang="en-US" sz="2600" dirty="0"/>
+            <a:endParaRPr lang="en-US" sz="2300" dirty="0"/>
           </a:p>
         </p:txBody>
       </p:sp>
@@ -22237,8 +22237,8 @@
         </p:nvSpPr>
         <p:spPr>
           <a:xfrm>
-            <a:off x="3573018" y="2898648"/>
-            <a:ext cx="2219706" cy="347472"/>
+            <a:off x="3573018" y="2752344"/>
+            <a:ext cx="2219706" cy="310896"/>
           </a:xfrm>
           <a:prstGeom prst="rect">
             <a:avLst/>
@@ -22281,7 +22281,7 @@
         </p:nvSpPr>
         <p:spPr>
           <a:xfrm>
-            <a:off x="3573018" y="3300984"/>
+            <a:off x="3573018" y="3118104"/>
             <a:ext cx="2219706" cy="0"/>
           </a:xfrm>
           <a:prstGeom prst="line">
@@ -22304,8 +22304,8 @@
         </p:nvSpPr>
         <p:spPr>
           <a:xfrm>
-            <a:off x="3573018" y="3410712"/>
-            <a:ext cx="2219706" cy="1831848"/>
+            <a:off x="3573018" y="3209544"/>
+            <a:ext cx="2219706" cy="2005584"/>
           </a:xfrm>
           <a:prstGeom prst="rect">
             <a:avLst/>
@@ -22402,8 +22402,8 @@
         </p:nvSpPr>
         <p:spPr>
           <a:xfrm>
-            <a:off x="6396228" y="1965960"/>
-            <a:ext cx="2219706" cy="292608"/>
+            <a:off x="6396228" y="1929384"/>
+            <a:ext cx="2219706" cy="274320"/>
           </a:xfrm>
           <a:prstGeom prst="rect">
             <a:avLst/>
@@ -22438,8 +22438,8 @@
         </p:nvSpPr>
         <p:spPr>
           <a:xfrm>
-            <a:off x="6396228" y="2286000"/>
-            <a:ext cx="2219706" cy="603504"/>
+            <a:off x="6396228" y="2221992"/>
+            <a:ext cx="2219706" cy="512064"/>
           </a:xfrm>
           <a:prstGeom prst="rect">
             <a:avLst/>
@@ -22455,7 +22455,7 @@
               <a:buNone/>
             </a:pPr>
             <a:r>
-              <a:rPr lang="en-US" sz="2600" b="1" dirty="0">
+              <a:rPr lang="en-US" sz="2300" b="1" dirty="0">
                 <a:solidFill>
                   <a:schemeClr val="accent2"/>
                 </a:solidFill>
@@ -22466,7 +22466,7 @@
               <a:t>Was</a:t>
             </a:r>
             <a:r>
-              <a:rPr lang="en-US" sz="2600" b="1" dirty="0">
+              <a:rPr lang="en-US" sz="2300" b="1" dirty="0">
                 <a:solidFill>
                   <a:schemeClr val="tx2"/>
                 </a:solidFill>
@@ -22476,7 +22476,7 @@
               </a:rPr>
               <a:t> … -ing?</a:t>
             </a:r>
-            <a:endParaRPr lang="en-US" sz="2600" dirty="0"/>
+            <a:endParaRPr lang="en-US" sz="2300" dirty="0"/>
           </a:p>
         </p:txBody>
       </p:sp>
@@ -22488,8 +22488,8 @@
         </p:nvSpPr>
         <p:spPr>
           <a:xfrm>
-            <a:off x="6396228" y="2898648"/>
-            <a:ext cx="2219706" cy="347472"/>
+            <a:off x="6396228" y="2752344"/>
+            <a:ext cx="2219706" cy="310896"/>
           </a:xfrm>
           <a:prstGeom prst="rect">
             <a:avLst/>
@@ -22532,7 +22532,7 @@
         </p:nvSpPr>
         <p:spPr>
           <a:xfrm>
-            <a:off x="6396228" y="3300984"/>
+            <a:off x="6396228" y="3118104"/>
             <a:ext cx="2219706" cy="0"/>
           </a:xfrm>
           <a:prstGeom prst="line">
@@ -22555,8 +22555,8 @@
         </p:nvSpPr>
         <p:spPr>
           <a:xfrm>
-            <a:off x="6396228" y="3410712"/>
-            <a:ext cx="2219706" cy="1831848"/>
+            <a:off x="6396228" y="3209544"/>
+            <a:ext cx="2219706" cy="2005584"/>
           </a:xfrm>
           <a:prstGeom prst="rect">
             <a:avLst/>
@@ -22677,8 +22677,8 @@
         </p:nvSpPr>
         <p:spPr>
           <a:xfrm>
-            <a:off x="9219438" y="1965960"/>
-            <a:ext cx="2219706" cy="292608"/>
+            <a:off x="9219438" y="1929384"/>
+            <a:ext cx="2219706" cy="274320"/>
           </a:xfrm>
           <a:prstGeom prst="rect">
             <a:avLst/>
@@ -22713,8 +22713,8 @@
         </p:nvSpPr>
         <p:spPr>
           <a:xfrm>
-            <a:off x="9219438" y="2286000"/>
-            <a:ext cx="2219706" cy="603504"/>
+            <a:off x="9219438" y="2221992"/>
+            <a:ext cx="2219706" cy="512064"/>
           </a:xfrm>
           <a:prstGeom prst="rect">
             <a:avLst/>
@@ -22730,7 +22730,7 @@
               <a:buNone/>
             </a:pPr>
             <a:r>
-              <a:rPr lang="en-US" sz="2600" b="1" dirty="0">
+              <a:rPr lang="en-US" sz="2300" b="1" dirty="0">
                 <a:solidFill>
                   <a:schemeClr val="tx2"/>
                 </a:solidFill>
@@ -22741,7 +22741,7 @@
               <a:t>Yes, it </a:t>
             </a:r>
             <a:r>
-              <a:rPr lang="en-US" sz="2600" b="1" dirty="0">
+              <a:rPr lang="en-US" sz="2300" b="1" dirty="0">
                 <a:solidFill>
                   <a:schemeClr val="accent2"/>
                 </a:solidFill>
@@ -22752,7 +22752,7 @@
               <a:t>was</a:t>
             </a:r>
             <a:r>
-              <a:rPr lang="en-US" sz="2600" b="1" dirty="0">
+              <a:rPr lang="en-US" sz="2300" b="1" dirty="0">
                 <a:solidFill>
                   <a:schemeClr val="tx2"/>
                 </a:solidFill>
@@ -22762,7 +22762,7 @@
               </a:rPr>
               <a:t>.</a:t>
             </a:r>
-            <a:endParaRPr lang="en-US" sz="2600" dirty="0"/>
+            <a:endParaRPr lang="en-US" sz="2300" dirty="0"/>
           </a:p>
         </p:txBody>
       </p:sp>
@@ -22774,8 +22774,8 @@
         </p:nvSpPr>
         <p:spPr>
           <a:xfrm>
-            <a:off x="9219438" y="2898648"/>
-            <a:ext cx="2219706" cy="347472"/>
+            <a:off x="9219438" y="2752344"/>
+            <a:ext cx="2219706" cy="310896"/>
           </a:xfrm>
           <a:prstGeom prst="rect">
             <a:avLst/>
@@ -22826,7 +22826,7 @@
         </p:nvSpPr>
         <p:spPr>
           <a:xfrm>
-            <a:off x="9219438" y="3300984"/>
+            <a:off x="9219438" y="3118104"/>
             <a:ext cx="2219706" cy="0"/>
           </a:xfrm>
           <a:prstGeom prst="line">
@@ -22849,8 +22849,8 @@
         </p:nvSpPr>
         <p:spPr>
           <a:xfrm>
-            <a:off x="9219438" y="3410712"/>
-            <a:ext cx="2219706" cy="1831848"/>
+            <a:off x="9219438" y="3209544"/>
+            <a:ext cx="2219706" cy="2005584"/>
           </a:xfrm>
           <a:prstGeom prst="rect">
             <a:avLst/>
@@ -34144,7 +34144,7 @@
                   <a:schemeClr val="accent5"/>
                 </a:solidFill>
               </a:rPr>
-              <a:t>   in charge of the building</a:t>
+              <a:t>   called you at 6.58</a:t>
             </a:r>
             <a:endParaRPr lang="en-US" sz="1800" dirty="0"/>
           </a:p>
@@ -34588,7 +34588,7 @@
                   <a:schemeClr val="accent5"/>
                 </a:solidFill>
               </a:rPr>
-              <a:t>   IT — the server rack</a:t>
+              <a:t>   behind the server rack</a:t>
             </a:r>
             <a:endParaRPr lang="en-US" sz="1800" dirty="0"/>
           </a:p>

--- a/powerpoints/Seance_04_Scene2_The_room.pptx
+++ b/powerpoints/Seance_04_Scene2_The_room.pptx
@@ -142,18 +142,18 @@
   <p:extLst>
     <p:ext uri="{521415D9-36F7-43E2-AB2F-B90AF26B5E84}">
       <p14:sectionLst xmlns:p14="http://schemas.microsoft.com/office/powerpoint/2010/main">
-        <p14:section name="Ouverture" id="{814c6e3e-17c5-4fc6-97ed-c9901d373b06}">
+        <p14:section name="Ouverture" id="{2644a76b-df71-efd8-5009-ff242b380f40}">
           <p14:sldIdLst>
             <p14:sldId id="256"/>
           </p14:sldIdLst>
         </p14:section>
-        <p14:section name="Warm-up" id="{3d623aa8-3c46-055b-8b9a-20bf9a6a278e}">
+        <p14:section name="Warm-up" id="{c45365a1-b210-2ef1-ff27-f03479090e27}">
           <p14:sldIdLst>
             <p14:sldId id="257"/>
             <p14:sldId id="258"/>
           </p14:sldIdLst>
         </p14:section>
-        <p14:section name="The room" id="{9c5e8d4c-6660-845f-2089-ed067bbb29df}">
+        <p14:section name="The room" id="{dc68d7f8-db41-d1f3-5e99-a2eba0832078}">
           <p14:sldIdLst>
             <p14:sldId id="259"/>
             <p14:sldId id="260"/>
@@ -164,7 +164,7 @@
             <p14:sldId id="265"/>
           </p14:sldIdLst>
         </p14:section>
-        <p14:section name="Listen, then read" id="{4d6df30b-d633-efef-e097-68f4fe3a985b}">
+        <p14:section name="Listen, then read" id="{7d88d04f-c37f-affd-b7b6-070a65e8ec12}">
           <p14:sldIdLst>
             <p14:sldId id="266"/>
             <p14:sldId id="267"/>
@@ -173,7 +173,7 @@
             <p14:sldId id="270"/>
           </p14:sldIdLst>
         </p14:section>
-        <p14:section name="Read for facts" id="{762534d8-1365-7078-1425-033677aa7fb3}">
+        <p14:section name="Read for facts" id="{749cefdb-5933-4a95-7d41-3abcb1f7fec3}">
           <p14:sldIdLst>
             <p14:sldId id="271"/>
             <p14:sldId id="272"/>
@@ -184,7 +184,7 @@
             <p14:sldId id="277"/>
           </p14:sldIdLst>
         </p14:section>
-        <p14:section name="Grammar: the past continuous" id="{3c3042fc-44c5-03c5-12fb-85a4351c164c}">
+        <p14:section name="Grammar: the past continuous" id="{d9ac1eeb-a93f-2933-6419-1bbf945b3c32}">
           <p14:sldIdLst>
             <p14:sldId id="278"/>
             <p14:sldId id="279"/>
@@ -195,13 +195,13 @@
             <p14:sldId id="284"/>
           </p14:sldIdLst>
         </p14:section>
-        <p14:section name="Listening: the cleaner" id="{d0637a4c-6968-5198-8ba8-c3c1cc7c3876}">
+        <p14:section name="Listening: the cleaner" id="{0cfe2440-cec6-840f-94b1-cb3d41fe1de6}">
           <p14:sldIdLst>
             <p14:sldId id="285"/>
             <p14:sldId id="286"/>
           </p14:sldIdLst>
         </p14:section>
-        <p14:section name="Words and speaking" id="{20a41d68-d754-f6aa-6552-c1745f6642b4}">
+        <p14:section name="Words and speaking" id="{25ea9f15-188e-239b-12af-cff59c217e32}">
           <p14:sldIdLst>
             <p14:sldId id="287"/>
             <p14:sldId id="288"/>
@@ -209,7 +209,7 @@
             <p14:sldId id="290"/>
           </p14:sldIdLst>
         </p14:section>
-        <p14:section name="Clôture" id="{112006c6-1581-8146-6a7a-1b5ffa1ab06d}">
+        <p14:section name="Clôture" id="{378cd20b-8614-997e-280e-dfaabb3445b7}">
           <p14:sldIdLst>
             <p14:sldId id="291"/>
           </p14:sldIdLst>

--- a/powerpoints/Seance_04_Scene2_The_room.pptx
+++ b/powerpoints/Seance_04_Scene2_The_room.pptx
@@ -142,18 +142,18 @@
   <p:extLst>
     <p:ext uri="{521415D9-36F7-43E2-AB2F-B90AF26B5E84}">
       <p14:sectionLst xmlns:p14="http://schemas.microsoft.com/office/powerpoint/2010/main">
-        <p14:section name="Ouverture" id="{2644a76b-df71-efd8-5009-ff242b380f40}">
+        <p14:section name="Ouverture" id="{8f471797-5524-1df0-5d5f-aefd66924d48}">
           <p14:sldIdLst>
             <p14:sldId id="256"/>
           </p14:sldIdLst>
         </p14:section>
-        <p14:section name="Warm-up" id="{c45365a1-b210-2ef1-ff27-f03479090e27}">
+        <p14:section name="Warm-up" id="{ad6147c7-9dcd-feb5-dc21-fac7ea4c772e}">
           <p14:sldIdLst>
             <p14:sldId id="257"/>
             <p14:sldId id="258"/>
           </p14:sldIdLst>
         </p14:section>
-        <p14:section name="The room" id="{dc68d7f8-db41-d1f3-5e99-a2eba0832078}">
+        <p14:section name="The room" id="{14439c03-950e-74b4-6276-d32b78f2dc0f}">
           <p14:sldIdLst>
             <p14:sldId id="259"/>
             <p14:sldId id="260"/>
@@ -164,7 +164,7 @@
             <p14:sldId id="265"/>
           </p14:sldIdLst>
         </p14:section>
-        <p14:section name="Listen, then read" id="{7d88d04f-c37f-affd-b7b6-070a65e8ec12}">
+        <p14:section name="Listen, then read" id="{94762ee5-f481-fa86-1501-61e0fd1a15e1}">
           <p14:sldIdLst>
             <p14:sldId id="266"/>
             <p14:sldId id="267"/>
@@ -173,7 +173,7 @@
             <p14:sldId id="270"/>
           </p14:sldIdLst>
         </p14:section>
-        <p14:section name="Read for facts" id="{749cefdb-5933-4a95-7d41-3abcb1f7fec3}">
+        <p14:section name="Read for facts" id="{2202a743-f850-65db-0a13-7590331d48b0}">
           <p14:sldIdLst>
             <p14:sldId id="271"/>
             <p14:sldId id="272"/>
@@ -184,7 +184,7 @@
             <p14:sldId id="277"/>
           </p14:sldIdLst>
         </p14:section>
-        <p14:section name="Grammar: the past continuous" id="{d9ac1eeb-a93f-2933-6419-1bbf945b3c32}">
+        <p14:section name="Grammar: the past continuous" id="{65339d65-75b6-697e-a40d-8ba8c390d19b}">
           <p14:sldIdLst>
             <p14:sldId id="278"/>
             <p14:sldId id="279"/>
@@ -195,13 +195,13 @@
             <p14:sldId id="284"/>
           </p14:sldIdLst>
         </p14:section>
-        <p14:section name="Listening: the cleaner" id="{0cfe2440-cec6-840f-94b1-cb3d41fe1de6}">
+        <p14:section name="Listening: the cleaner" id="{2b458efd-8557-4b27-cc12-fdaff3b6f59c}">
           <p14:sldIdLst>
             <p14:sldId id="285"/>
             <p14:sldId id="286"/>
           </p14:sldIdLst>
         </p14:section>
-        <p14:section name="Words and speaking" id="{25ea9f15-188e-239b-12af-cff59c217e32}">
+        <p14:section name="Words and speaking" id="{d627a8c2-fe33-4c86-82c7-ddb994c70d49}">
           <p14:sldIdLst>
             <p14:sldId id="287"/>
             <p14:sldId id="288"/>
@@ -209,7 +209,7 @@
             <p14:sldId id="290"/>
           </p14:sldIdLst>
         </p14:section>
-        <p14:section name="Clôture" id="{378cd20b-8614-997e-280e-dfaabb3445b7}">
+        <p14:section name="Clôture" id="{9e1f151d-f192-1d43-efb7-6eb270451ef0}">
           <p14:sldIdLst>
             <p14:sldId id="291"/>
           </p14:sldIdLst>
@@ -25775,8 +25775,31 @@
         </p:nvSpPr>
         <p:spPr>
           <a:xfrm>
-            <a:off x="10860830" y="3561588"/>
-            <a:ext cx="91440" cy="621792"/>
+            <a:off x="10906550" y="2427732"/>
+            <a:ext cx="0" cy="1261872"/>
+          </a:xfrm>
+          <a:prstGeom prst="line">
+            <a:avLst/>
+          </a:prstGeom>
+          <a:noFill/>
+          <a:ln w="19050">
+            <a:solidFill>
+              <a:srgbClr val="B03A2E"/>
+            </a:solidFill>
+            <a:prstDash val="dash"/>
+          </a:ln>
+        </p:spPr>
+      </p:sp>
+      <p:sp>
+        <p:nvSpPr>
+          <p:cNvPr id="29" name="Shape 26"/>
+          <p:cNvSpPr/>
+          <p:nvPr/>
+        </p:nvSpPr>
+        <p:spPr>
+          <a:xfrm>
+            <a:off x="10860830" y="3689604"/>
+            <a:ext cx="91440" cy="365760"/>
           </a:xfrm>
           <a:prstGeom prst="rect">
             <a:avLst/>
@@ -25789,13 +25812,13 @@
       </p:sp>
       <p:sp>
         <p:nvSpPr>
-          <p:cNvPr id="29" name="Text 26"/>
+          <p:cNvPr id="30" name="Text 27"/>
           <p:cNvSpPr txBox="1"/>
           <p:nvPr/>
         </p:nvSpPr>
         <p:spPr>
           <a:xfrm>
-            <a:off x="10266470" y="3250692"/>
+            <a:off x="10266470" y="2153412"/>
             <a:ext cx="1280160" cy="274320"/>
           </a:xfrm>
           <a:prstGeom prst="rect">
@@ -25825,7 +25848,7 @@
       </p:sp>
       <p:sp>
         <p:nvSpPr>
-          <p:cNvPr id="30" name="Shape 27"/>
+          <p:cNvPr id="31" name="Shape 28"/>
           <p:cNvSpPr/>
           <p:nvPr/>
         </p:nvSpPr>
@@ -25848,7 +25871,7 @@
       </p:sp>
       <p:sp>
         <p:nvSpPr>
-          <p:cNvPr id="31" name="Text 28"/>
+          <p:cNvPr id="32" name="Text 29"/>
           <p:cNvSpPr/>
           <p:nvPr/>
         </p:nvSpPr>
@@ -25888,7 +25911,7 @@
       </p:sp>
       <p:sp>
         <p:nvSpPr>
-          <p:cNvPr id="32" name="Shape 29"/>
+          <p:cNvPr id="33" name="Shape 30"/>
           <p:cNvSpPr/>
           <p:nvPr/>
         </p:nvSpPr>
@@ -25913,7 +25936,7 @@
       </p:sp>
       <p:sp>
         <p:nvSpPr>
-          <p:cNvPr id="33" name="Shape 30"/>
+          <p:cNvPr id="34" name="Shape 31"/>
           <p:cNvSpPr/>
           <p:nvPr/>
         </p:nvSpPr>
@@ -25936,7 +25959,7 @@
       </p:sp>
       <p:sp>
         <p:nvSpPr>
-          <p:cNvPr id="34" name="Text 31"/>
+          <p:cNvPr id="35" name="Text 32"/>
           <p:cNvSpPr/>
           <p:nvPr/>
         </p:nvSpPr>
@@ -25976,7 +25999,7 @@
       </p:sp>
       <p:sp>
         <p:nvSpPr>
-          <p:cNvPr id="35" name="Shape 32"/>
+          <p:cNvPr id="36" name="Shape 33"/>
           <p:cNvSpPr/>
           <p:nvPr/>
         </p:nvSpPr>
@@ -26001,7 +26024,7 @@
       </p:sp>
       <p:sp>
         <p:nvSpPr>
-          <p:cNvPr id="36" name="Shape 33"/>
+          <p:cNvPr id="37" name="Shape 34"/>
           <p:cNvSpPr/>
           <p:nvPr/>
         </p:nvSpPr>
@@ -26024,7 +26047,7 @@
       </p:sp>
       <p:sp>
         <p:nvSpPr>
-          <p:cNvPr id="37" name="Text 34"/>
+          <p:cNvPr id="38" name="Text 35"/>
           <p:cNvSpPr/>
           <p:nvPr/>
         </p:nvSpPr>
@@ -26064,7 +26087,7 @@
       </p:sp>
       <p:sp>
         <p:nvSpPr>
-          <p:cNvPr id="38" name="Shape 35"/>
+          <p:cNvPr id="39" name="Shape 36"/>
           <p:cNvSpPr/>
           <p:nvPr/>
         </p:nvSpPr>
@@ -26089,7 +26112,7 @@
       </p:sp>
       <p:sp>
         <p:nvSpPr>
-          <p:cNvPr id="39" name="Shape 36"/>
+          <p:cNvPr id="40" name="Shape 37"/>
           <p:cNvSpPr/>
           <p:nvPr/>
         </p:nvSpPr>
@@ -26113,7 +26136,7 @@
       </p:sp>
       <p:sp>
         <p:nvSpPr>
-          <p:cNvPr id="40" name="Text 37"/>
+          <p:cNvPr id="41" name="Text 38"/>
           <p:cNvSpPr txBox="1"/>
           <p:nvPr/>
         </p:nvSpPr>
@@ -26165,7 +26188,7 @@
       </p:sp>
       <p:sp>
         <p:nvSpPr>
-          <p:cNvPr id="41" name="Shape 38"/>
+          <p:cNvPr id="42" name="Shape 39"/>
           <p:cNvSpPr/>
           <p:nvPr/>
         </p:nvSpPr>
@@ -26185,7 +26208,7 @@
       </p:sp>
       <p:sp>
         <p:nvSpPr>
-          <p:cNvPr id="42" name="Text 39"/>
+          <p:cNvPr id="43" name="Text 40"/>
           <p:cNvSpPr txBox="1"/>
           <p:nvPr/>
         </p:nvSpPr>
